--- a/output/final_presentation.pptx
+++ b/output/final_presentation.pptx
@@ -13,7 +13,6 @@
     <p:sldId id="261" r:id="rId12"/>
     <p:sldId id="262" r:id="rId13"/>
     <p:sldId id="263" r:id="rId14"/>
-    <p:sldId id="264" r:id="rId15"/>
   </p:sldIdLst>
   <p:sldSz cx="9144000" cy="6858000" type="screen4x3"/>
   <p:notesSz cx="6858000" cy="9144000"/>
@@ -3092,7 +3091,7 @@
     <p:bg>
       <p:bgPr>
         <a:solidFill>
-          <a:srgbClr val="111827"/>
+          <a:srgbClr val="1E1B4B"/>
         </a:solidFill>
         <a:effectLst/>
       </p:bgPr>
@@ -3132,13 +3131,13 @@
             <a:pPr algn="just">
               <a:defRPr sz="3000">
                 <a:solidFill>
-                  <a:srgbClr val="F9FAFB"/>
-                </a:solidFill>
-                <a:latin typeface="Playfair Display"/>
+                  <a:srgbClr val="F5F3FF"/>
+                </a:solidFill>
+                <a:latin typeface="Archivo Black"/>
               </a:defRPr>
             </a:pPr>
             <a:r>
-              <a:t>Unlocking the Future of Innovation</a:t>
+              <a:t>Black Holes: Cosmic Phenomena of Infinite Mystery</a:t>
             </a:r>
           </a:p>
         </p:txBody>
@@ -3171,13 +3170,13 @@
             <a:pPr algn="just">
               <a:defRPr sz="1800">
                 <a:solidFill>
-                  <a:srgbClr val="F9FAFB"/>
-                </a:solidFill>
-                <a:latin typeface="Lato"/>
+                  <a:srgbClr val="F5F3FF"/>
+                </a:solidFill>
+                <a:latin typeface="Work Sans"/>
               </a:defRPr>
             </a:pPr>
             <a:r>
-              <a:t>Transforming Ideas into Impact Through Strategic Vision</a:t>
+              <a:t>Regions of spacetime where gravity's pull is so intense not even light can escape.</a:t>
             </a:r>
           </a:p>
         </p:txBody>
@@ -3196,7 +3195,7 @@
     <p:bg>
       <p:bgPr>
         <a:solidFill>
-          <a:srgbClr val="111827"/>
+          <a:srgbClr val="1E1B4B"/>
         </a:solidFill>
         <a:effectLst/>
       </p:bgPr>
@@ -3234,15 +3233,15 @@
           <a:lstStyle/>
           <a:p>
             <a:pPr algn="just">
-              <a:defRPr sz="2100">
-                <a:solidFill>
-                  <a:srgbClr val="F9FAFB"/>
-                </a:solidFill>
-                <a:latin typeface="Playfair Display"/>
+              <a:defRPr sz="2000">
+                <a:solidFill>
+                  <a:srgbClr val="F5F3FF"/>
+                </a:solidFill>
+                <a:latin typeface="Archivo Black"/>
               </a:defRPr>
             </a:pPr>
             <a:r>
-              <a:t>Mickey Mouse's 1928 Debut: Steamboat Willie's Technical Innovations</a:t>
+              <a:t>From Dark Stars to General Relativity: A Century of Gravitational Theory</a:t>
             </a:r>
           </a:p>
         </p:txBody>
@@ -3275,13 +3274,13 @@
             <a:pPr algn="just">
               <a:defRPr sz="1800">
                 <a:solidFill>
-                  <a:srgbClr val="F9FAFB"/>
-                </a:solidFill>
-                <a:latin typeface="Lato"/>
+                  <a:srgbClr val="F5F3FF"/>
+                </a:solidFill>
+                <a:latin typeface="Work Sans"/>
               </a:defRPr>
             </a:pPr>
             <a:r>
-              <a:t>In 1928, Walt Disney introduced Steamboat Willie, revolutionizing animation with synchronized sound. The film utilized Disney's patented 'Disney Sound System,' aligning precise audio effects (whistles, steam, and dialogue) with on-screen actions via precise frame-by-frame timing. It was the first animated film to fully integrate music, sound effects, and character vocals, setting a new standard for Hollywood. This breakthrough, achieved through collaboration with Ub Iwerks, cemented animated sound as a narrative tool and launched Mickey Mouse as a global icon.</a:t>
+              <a:t>John Michell proposed 'dark stars' in 1783, hypothesizing massive objects with gravity strong enough to prevent light escape. This Newtonian concept prefigured black holes. Einstein’s 1916 general relativity redefined gravity as spacetime curvature, mathematically predicting event horizons. Michell’s speculative idea evolved into a rigorous framework, bridging classical and relativistic astrophysics.</a:t>
             </a:r>
           </a:p>
         </p:txBody>
@@ -3300,7 +3299,7 @@
     <p:bg>
       <p:bgPr>
         <a:solidFill>
-          <a:srgbClr val="111827"/>
+          <a:srgbClr val="1E1B4B"/>
         </a:solidFill>
         <a:effectLst/>
       </p:bgPr>
@@ -3338,15 +3337,15 @@
           <a:lstStyle/>
           <a:p>
             <a:pPr algn="just">
-              <a:defRPr sz="2500">
-                <a:solidFill>
-                  <a:srgbClr val="F9FAFB"/>
-                </a:solidFill>
-                <a:latin typeface="Playfair Display"/>
+              <a:defRPr sz="3000">
+                <a:solidFill>
+                  <a:srgbClr val="F5F3FF"/>
+                </a:solidFill>
+                <a:latin typeface="Archivo Black"/>
               </a:defRPr>
             </a:pPr>
             <a:r>
-              <a:t>1930s–1940s: Design Evolution &amp; Cultural Shifts</a:t>
+              <a:t>Evolution of Stellar Collapse Models</a:t>
             </a:r>
           </a:p>
         </p:txBody>
@@ -3366,7 +3365,7 @@
             <a:avLst/>
           </a:prstGeom>
           <a:solidFill>
-            <a:srgbClr val="1F2937"/>
+            <a:srgbClr val="4C1D95"/>
           </a:solidFill>
           <a:ln>
             <a:noFill/>
@@ -3409,7 +3408,7 @@
             <a:avLst/>
           </a:prstGeom>
           <a:solidFill>
-            <a:srgbClr val="1F2937"/>
+            <a:srgbClr val="4C1D95"/>
           </a:solidFill>
           <a:ln>
             <a:noFill/>
@@ -3463,57 +3462,15 @@
           <a:lstStyle/>
           <a:p>
             <a:pPr algn="just">
-              <a:defRPr sz="1600">
-                <a:solidFill>
-                  <a:srgbClr val="F9FAFB"/>
-                </a:solidFill>
-                <a:latin typeface="Lato"/>
+              <a:defRPr sz="1800">
+                <a:solidFill>
+                  <a:srgbClr val="F5F3FF"/>
+                </a:solidFill>
+                <a:latin typeface="Work Sans"/>
               </a:defRPr>
             </a:pPr>
             <a:r>
-              <a:t>1930s: Art Deco peaks in architecture and industrial design, emphasizing geometric forms and luxury materials.</a:t>
-            </a:r>
-          </a:p>
-          <a:p>
-            <a:pPr algn="just">
-              <a:defRPr sz="1600">
-                <a:solidFill>
-                  <a:srgbClr val="F9FAFB"/>
-                </a:solidFill>
-              </a:defRPr>
-            </a:pPr>
-          </a:p>
-          <a:p>
-            <a:pPr algn="just">
-              <a:defRPr sz="1600">
-                <a:solidFill>
-                  <a:srgbClr val="F9FAFB"/>
-                </a:solidFill>
-              </a:defRPr>
-            </a:pPr>
-            <a:r>
-              <a:t>1940s: Wartime constraints drive minimalist 'utilitarian design'—streamlined steel and molded plastic replace ornate elements.</a:t>
-            </a:r>
-          </a:p>
-          <a:p>
-            <a:pPr algn="just">
-              <a:defRPr sz="1600">
-                <a:solidFill>
-                  <a:srgbClr val="F9FAFB"/>
-                </a:solidFill>
-              </a:defRPr>
-            </a:pPr>
-          </a:p>
-          <a:p>
-            <a:pPr algn="just">
-              <a:defRPr sz="1600">
-                <a:solidFill>
-                  <a:srgbClr val="F9FAFB"/>
-                </a:solidFill>
-              </a:defRPr>
-            </a:pPr>
-            <a:r>
-              <a:t>Post-war modernism emerges, prioritizing function over form with International Style architecture and Bauhaus-inspired furniture.</a:t>
+              <a:t>1916: Schwarzschild derived the first exact solution to Einstein's field equations, defining the Schwarzschild radius—the critical boundary of non-rotating black holes.</a:t>
             </a:r>
           </a:p>
         </p:txBody>
@@ -3544,57 +3501,15 @@
           <a:lstStyle/>
           <a:p>
             <a:pPr algn="just">
-              <a:defRPr sz="1700">
-                <a:solidFill>
-                  <a:srgbClr val="F9FAFB"/>
-                </a:solidFill>
-                <a:latin typeface="Lato"/>
+              <a:defRPr sz="1800">
+                <a:solidFill>
+                  <a:srgbClr val="F5F3FF"/>
+                </a:solidFill>
+                <a:latin typeface="Work Sans"/>
               </a:defRPr>
             </a:pPr>
             <a:r>
-              <a:t>1930s: Great Depression fuels populist art like New Deal murals; cinema and jazz become mass cultural escapes.</a:t>
-            </a:r>
-          </a:p>
-          <a:p>
-            <a:pPr algn="just">
-              <a:defRPr sz="1700">
-                <a:solidFill>
-                  <a:srgbClr val="F9FAFB"/>
-                </a:solidFill>
-              </a:defRPr>
-            </a:pPr>
-          </a:p>
-          <a:p>
-            <a:pPr algn="just">
-              <a:defRPr sz="1700">
-                <a:solidFill>
-                  <a:srgbClr val="F9FAFB"/>
-                </a:solidFill>
-              </a:defRPr>
-            </a:pPr>
-            <a:r>
-              <a:t>1940s: WWII propaganda shapes public messaging through posters and radio; rationing sparks DIY culture.</a:t>
-            </a:r>
-          </a:p>
-          <a:p>
-            <a:pPr algn="just">
-              <a:defRPr sz="1700">
-                <a:solidFill>
-                  <a:srgbClr val="F9FAFB"/>
-                </a:solidFill>
-              </a:defRPr>
-            </a:pPr>
-          </a:p>
-          <a:p>
-            <a:pPr algn="just">
-              <a:defRPr sz="1700">
-                <a:solidFill>
-                  <a:srgbClr val="F9FAFB"/>
-                </a:solidFill>
-              </a:defRPr>
-            </a:pPr>
-            <a:r>
-              <a:t>1945: GI Bill transforms education and housing, seeding suburban culture and mid-century modern aesthetics.</a:t>
+              <a:t>1930s: Chandrasekhar calculated the maximum mass (Chandrasekhar limit) a white dwarf can sustain, beyond which electron degeneracy pressure fails to counteract gravitational collapse.</a:t>
             </a:r>
           </a:p>
         </p:txBody>
@@ -3613,7 +3528,135 @@
     <p:bg>
       <p:bgPr>
         <a:solidFill>
-          <a:srgbClr val="111827"/>
+          <a:srgbClr val="1E1B4B"/>
+        </a:solidFill>
+        <a:effectLst/>
+      </p:bgPr>
+    </p:bg>
+    <p:spTree>
+      <p:nvGrpSpPr>
+        <p:cNvPr id="1" name=""/>
+        <p:cNvGrpSpPr/>
+        <p:nvPr/>
+      </p:nvGrpSpPr>
+      <p:grpSpPr/>
+      <p:sp>
+        <p:nvSpPr>
+          <p:cNvPr id="2" name="TextBox 1"/>
+          <p:cNvSpPr txBox="1"/>
+          <p:nvPr/>
+        </p:nvSpPr>
+        <p:spPr>
+          <a:xfrm>
+            <a:off x="457200" y="1371600"/>
+            <a:ext cx="2286000" cy="3657600"/>
+          </a:xfrm>
+          <a:prstGeom prst="rect">
+            <a:avLst/>
+          </a:prstGeom>
+          <a:noFill/>
+          <a:ln w="9525">
+            <a:noFill/>
+          </a:ln>
+        </p:spPr>
+        <p:txBody>
+          <a:bodyPr wrap="square">
+            <a:normAutofit/>
+          </a:bodyPr>
+          <a:lstStyle/>
+          <a:p>
+            <a:pPr algn="just">
+              <a:defRPr sz="3000">
+                <a:solidFill>
+                  <a:srgbClr val="F5F3FF"/>
+                </a:solidFill>
+                <a:latin typeface="Archivo Black"/>
+              </a:defRPr>
+            </a:pPr>
+            <a:r>
+              <a:t>1960s-70s Breakthroughs in Black Hole Physics</a:t>
+            </a:r>
+          </a:p>
+        </p:txBody>
+      </p:sp>
+      <p:sp>
+        <p:nvSpPr>
+          <p:cNvPr id="3" name="TextBox 2"/>
+          <p:cNvSpPr txBox="1"/>
+          <p:nvPr/>
+        </p:nvSpPr>
+        <p:spPr>
+          <a:xfrm>
+            <a:off x="3200400" y="1371600"/>
+            <a:ext cx="5486400" cy="4572000"/>
+          </a:xfrm>
+          <a:prstGeom prst="rect">
+            <a:avLst/>
+          </a:prstGeom>
+          <a:noFill/>
+          <a:ln w="9525">
+            <a:noFill/>
+          </a:ln>
+        </p:spPr>
+        <p:txBody>
+          <a:bodyPr wrap="square">
+            <a:normAutofit/>
+          </a:bodyPr>
+          <a:lstStyle/>
+          <a:p>
+            <a:pPr algn="just">
+              <a:defRPr sz="1800">
+                <a:solidFill>
+                  <a:srgbClr val="F5F3FF"/>
+                </a:solidFill>
+                <a:latin typeface="Work Sans"/>
+              </a:defRPr>
+            </a:pPr>
+            <a:r>
+              <a:t>• Introduction of 'black hole' terminology in 1967 popularized the concept of gravitational collapse and event horizons in astrophysical discourse</a:t>
+            </a:r>
+          </a:p>
+          <a:p>
+            <a:pPr algn="just">
+              <a:defRPr sz="1800">
+                <a:solidFill>
+                  <a:srgbClr val="F5F3FF"/>
+                </a:solidFill>
+              </a:defRPr>
+            </a:pPr>
+            <a:r>
+              <a:t>• Penrose's 1965 singularity theorems mathematically demonstrated inevitable spacetime singularities under general relativity conditions</a:t>
+            </a:r>
+          </a:p>
+          <a:p>
+            <a:pPr algn="just">
+              <a:defRPr sz="1800">
+                <a:solidFill>
+                  <a:srgbClr val="F5F3FF"/>
+                </a:solidFill>
+              </a:defRPr>
+            </a:pPr>
+            <a:r>
+              <a:t>• Hawking radiation (1974) proposed quantum particle emission from black holes, bridging quantum mechanics and gravitational theory</a:t>
+            </a:r>
+          </a:p>
+        </p:txBody>
+      </p:sp>
+    </p:spTree>
+  </p:cSld>
+  <p:clrMapOvr>
+    <a:masterClrMapping/>
+  </p:clrMapOvr>
+</p:sld>
+</file>
+
+<file path=ppt/slides/slide5.xml><?xml version="1.0" encoding="utf-8"?>
+<p:sld xmlns:a="http://schemas.openxmlformats.org/drawingml/2006/main" xmlns:p="http://schemas.openxmlformats.org/presentationml/2006/main" xmlns:r="http://schemas.openxmlformats.org/officeDocument/2006/relationships">
+  <p:cSld>
+    <p:bg>
+      <p:bgPr>
+        <a:solidFill>
+          <a:srgbClr val="1E1B4B"/>
         </a:solidFill>
         <a:effectLst/>
       </p:bgPr>
@@ -3651,22 +3694,22 @@
           <a:lstStyle/>
           <a:p>
             <a:pPr algn="just">
-              <a:defRPr sz="1500">
-                <a:solidFill>
-                  <a:srgbClr val="F9FAFB"/>
-                </a:solidFill>
-                <a:latin typeface="Lato"/>
+              <a:defRPr sz="1800">
+                <a:solidFill>
+                  <a:srgbClr val="F5F3FF"/>
+                </a:solidFill>
+                <a:latin typeface="Work Sans"/>
               </a:defRPr>
             </a:pPr>
             <a:r>
-              <a:t>Television's rise in the 1950s-60s transformed American life. By 1955, 60% of households owned TV sets as networks like NBC and CBS expanded programming. Early shows like 'I Love Lucy' pioneered live studio audiences and multi-camera formats. The 1960s saw color TV adoption, with broadcasts covering civil rights marches and the space race. Primetime evolved from family sitcoms to include news and educational content, establishing TV as both entertainment and information gateway. This era laid the foundation for modern media's dual role in uniting and dividing public discourse.</a:t>
+              <a:t>The 2019 M87* image confirmed Einstein's general relativity predictions. The glowing ring (1.3 trillion km across) marks the event horizon, while the shadow reveals spacetime curvature. Captured by the Event Horizon Telescope's global network, this visualization translated radio wave data into visible light, proving black holes' existence and showcasing their immense mass (6.5 billion suns) 55 million light-years away.</a:t>
             </a:r>
           </a:p>
         </p:txBody>
       </p:sp>
       <p:pic>
         <p:nvPicPr>
-          <p:cNvPr id="4" name="Picture 3" descr="archival_photograph_of_a_1950s_cathoderay_television_set_glowing_in_a_dimly_lit.jpg"/>
+          <p:cNvPr id="4" name="Picture 3" descr="the_first_direct_image_of_a_black_hole_m87_captured_in_2019_center_shows_a_dark.jpg"/>
           <p:cNvPicPr>
             <a:picLocks noChangeAspect="1"/>
           </p:cNvPicPr>
@@ -3696,13 +3739,13 @@
 </p:sld>
 </file>
 
-<file path=ppt/slides/slide5.xml><?xml version="1.0" encoding="utf-8"?>
+<file path=ppt/slides/slide6.xml><?xml version="1.0" encoding="utf-8"?>
 <p:sld xmlns:a="http://schemas.openxmlformats.org/drawingml/2006/main" xmlns:p="http://schemas.openxmlformats.org/presentationml/2006/main" xmlns:r="http://schemas.openxmlformats.org/officeDocument/2006/relationships">
   <p:cSld>
     <p:bg>
       <p:bgPr>
         <a:solidFill>
-          <a:srgbClr val="111827"/>
+          <a:srgbClr val="1E1B4B"/>
         </a:solidFill>
         <a:effectLst/>
       </p:bgPr>
@@ -3716,100 +3759,14 @@
       <p:grpSpPr/>
       <p:sp>
         <p:nvSpPr>
-          <p:cNvPr id="2" name="Rectangle 1"/>
-          <p:cNvSpPr/>
+          <p:cNvPr id="2" name="TextBox 1"/>
+          <p:cNvSpPr txBox="1"/>
           <p:nvPr/>
         </p:nvSpPr>
         <p:spPr>
           <a:xfrm>
-            <a:off x="0" y="0"/>
-            <a:ext cx="4572000" cy="6858000"/>
-          </a:xfrm>
-          <a:prstGeom prst="rect">
-            <a:avLst/>
-          </a:prstGeom>
-          <a:solidFill>
-            <a:srgbClr val="1F2937"/>
-          </a:solidFill>
-          <a:ln>
-            <a:noFill/>
-          </a:ln>
-        </p:spPr>
-        <p:style>
-          <a:lnRef idx="1">
-            <a:schemeClr val="accent1"/>
-          </a:lnRef>
-          <a:fillRef idx="3">
-            <a:schemeClr val="accent1"/>
-          </a:fillRef>
-          <a:effectRef idx="2">
-            <a:schemeClr val="accent1"/>
-          </a:effectRef>
-          <a:fontRef idx="minor">
-            <a:schemeClr val="lt1"/>
-          </a:fontRef>
-        </p:style>
-        <p:txBody>
-          <a:bodyPr rtlCol="0" anchor="ctr"/>
-          <a:lstStyle/>
-          <a:p>
-            <a:pPr algn="ctr"/>
-          </a:p>
-        </p:txBody>
-      </p:sp>
-      <p:sp>
-        <p:nvSpPr>
-          <p:cNvPr id="3" name="Rectangle 2"/>
-          <p:cNvSpPr/>
-          <p:nvPr/>
-        </p:nvSpPr>
-        <p:spPr>
-          <a:xfrm>
-            <a:off x="4572000" y="0"/>
-            <a:ext cx="4572000" cy="6858000"/>
-          </a:xfrm>
-          <a:prstGeom prst="rect">
-            <a:avLst/>
-          </a:prstGeom>
-          <a:solidFill>
-            <a:srgbClr val="1F2937"/>
-          </a:solidFill>
-          <a:ln>
-            <a:noFill/>
-          </a:ln>
-        </p:spPr>
-        <p:style>
-          <a:lnRef idx="1">
-            <a:schemeClr val="accent1"/>
-          </a:lnRef>
-          <a:fillRef idx="3">
-            <a:schemeClr val="accent1"/>
-          </a:fillRef>
-          <a:effectRef idx="2">
-            <a:schemeClr val="accent1"/>
-          </a:effectRef>
-          <a:fontRef idx="minor">
-            <a:schemeClr val="lt1"/>
-          </a:fontRef>
-        </p:style>
-        <p:txBody>
-          <a:bodyPr rtlCol="0" anchor="ctr"/>
-          <a:lstStyle/>
-          <a:p>
-            <a:pPr algn="ctr"/>
-          </a:p>
-        </p:txBody>
-      </p:sp>
-      <p:sp>
-        <p:nvSpPr>
-          <p:cNvPr id="4" name="TextBox 3"/>
-          <p:cNvSpPr txBox="1"/>
-          <p:nvPr/>
-        </p:nvSpPr>
-        <p:spPr>
-          <a:xfrm>
-            <a:off x="457200" y="2011680"/>
-            <a:ext cx="3657600" cy="914400"/>
+            <a:off x="1371600" y="2286000"/>
+            <a:ext cx="2743200" cy="2743200"/>
           </a:xfrm>
           <a:prstGeom prst="rect">
             <a:avLst/>
@@ -3826,29 +3783,74 @@
           <a:lstStyle/>
           <a:p>
             <a:pPr algn="just">
-              <a:defRPr sz="3000">
-                <a:solidFill>
-                  <a:srgbClr val="F9FAFB"/>
-                </a:solidFill>
-                <a:latin typeface="Lato"/>
+              <a:defRPr sz="1400">
+                <a:solidFill>
+                  <a:srgbClr val="F5F3FF"/>
+                </a:solidFill>
+                <a:latin typeface="Work Sans"/>
               </a:defRPr>
             </a:pPr>
             <a:r>
-              <a:t>Geographic Expansion (1970s-1990s)</a:t>
-            </a:r>
-          </a:p>
-        </p:txBody>
-      </p:sp>
-      <p:sp>
-        <p:nvSpPr>
-          <p:cNvPr id="5" name="TextBox 4"/>
+              <a:t>Theoretical Predictions</a:t>
+            </a:r>
+          </a:p>
+          <a:p>
+            <a:pPr algn="just">
+              <a:defRPr sz="1400">
+                <a:solidFill>
+                  <a:srgbClr val="F5F3FF"/>
+                </a:solidFill>
+              </a:defRPr>
+            </a:pPr>
+          </a:p>
+          <a:p>
+            <a:pPr algn="just">
+              <a:defRPr sz="1400">
+                <a:solidFill>
+                  <a:srgbClr val="F5F3FF"/>
+                </a:solidFill>
+              </a:defRPr>
+            </a:pPr>
+            <a:r>
+              <a:t>1970s-80s: Cosmic microwave background radiation (CMB) fluctuations predicted by inflationary models</a:t>
+            </a:r>
+          </a:p>
+          <a:p>
+            <a:pPr algn="just">
+              <a:defRPr sz="1400">
+                <a:solidFill>
+                  <a:srgbClr val="F5F3FF"/>
+                </a:solidFill>
+              </a:defRPr>
+            </a:pPr>
+            <a:r>
+              <a:t>1980s: Cold dark matter (CDM) frameworks dominate structure formation theories</a:t>
+            </a:r>
+          </a:p>
+          <a:p>
+            <a:pPr algn="just">
+              <a:defRPr sz="1400">
+                <a:solidFill>
+                  <a:srgbClr val="F5F3FF"/>
+                </a:solidFill>
+              </a:defRPr>
+            </a:pPr>
+            <a:r>
+              <a:t>1990s: Lambda-CDM model forecasts accelerated universe expansion from dark energy</a:t>
+            </a:r>
+          </a:p>
+        </p:txBody>
+      </p:sp>
+      <p:sp>
+        <p:nvSpPr>
+          <p:cNvPr id="3" name="TextBox 2"/>
           <p:cNvSpPr txBox="1"/>
           <p:nvPr/>
         </p:nvSpPr>
         <p:spPr>
           <a:xfrm>
-            <a:off x="457200" y="3108960"/>
-            <a:ext cx="3657600" cy="2743200"/>
+            <a:off x="5029200" y="2286000"/>
+            <a:ext cx="2743200" cy="2743200"/>
           </a:xfrm>
           <a:prstGeom prst="rect">
             <a:avLst/>
@@ -3865,197 +3867,60 @@
           <a:lstStyle/>
           <a:p>
             <a:pPr algn="just">
-              <a:defRPr sz="1500">
-                <a:solidFill>
-                  <a:srgbClr val="F9FAFB"/>
-                </a:solidFill>
-                <a:latin typeface="Lato"/>
+              <a:defRPr sz="1300">
+                <a:solidFill>
+                  <a:srgbClr val="F5F3FF"/>
+                </a:solidFill>
+                <a:latin typeface="Work Sans"/>
               </a:defRPr>
             </a:pPr>
             <a:r>
-              <a:t>Companies established operations in Asia, Latin America, and Eastern Europe. Key drivers included economic reforms, trade agreements, and regional market liberalization. Japanese electronics firms expanded into the U.S., while European automakers entered South America. By the 1990s, multinational supply chains spanned three continents, prioritizing cost efficiency and access to emerging markets.</a:t>
-            </a:r>
-          </a:p>
-        </p:txBody>
-      </p:sp>
-      <p:sp>
-        <p:nvSpPr>
-          <p:cNvPr id="6" name="TextBox 5"/>
-          <p:cNvSpPr txBox="1"/>
-          <p:nvPr/>
-        </p:nvSpPr>
-        <p:spPr>
-          <a:xfrm>
-            <a:off x="5029200" y="2011680"/>
-            <a:ext cx="3657600" cy="914400"/>
-          </a:xfrm>
-          <a:prstGeom prst="rect">
-            <a:avLst/>
-          </a:prstGeom>
-          <a:noFill/>
-          <a:ln w="9525">
-            <a:noFill/>
-          </a:ln>
-        </p:spPr>
-        <p:txBody>
-          <a:bodyPr wrap="square">
-            <a:normAutofit/>
-          </a:bodyPr>
-          <a:lstStyle/>
+              <a:t>Observational Evidence</a:t>
+            </a:r>
+          </a:p>
           <a:p>
             <a:pPr algn="just">
-              <a:defRPr sz="2600">
-                <a:solidFill>
-                  <a:srgbClr val="F9FAFB"/>
-                </a:solidFill>
-                <a:latin typeface="Lato"/>
+              <a:defRPr sz="1300">
+                <a:solidFill>
+                  <a:srgbClr val="F5F3FF"/>
+                </a:solidFill>
               </a:defRPr>
             </a:pPr>
-            <a:r>
-              <a:t>Media Distribution Growth (1970s-1990s)</a:t>
-            </a:r>
-          </a:p>
-        </p:txBody>
-      </p:sp>
-      <p:sp>
-        <p:nvSpPr>
-          <p:cNvPr id="7" name="TextBox 6"/>
-          <p:cNvSpPr txBox="1"/>
-          <p:nvPr/>
-        </p:nvSpPr>
-        <p:spPr>
-          <a:xfrm>
-            <a:off x="5029200" y="3108960"/>
-            <a:ext cx="3657600" cy="2743200"/>
-          </a:xfrm>
-          <a:prstGeom prst="rect">
-            <a:avLst/>
-          </a:prstGeom>
-          <a:noFill/>
-          <a:ln w="9525">
-            <a:noFill/>
-          </a:ln>
-        </p:spPr>
-        <p:txBody>
-          <a:bodyPr wrap="square">
-            <a:normAutofit/>
-          </a:bodyPr>
-          <a:lstStyle/>
+          </a:p>
           <a:p>
             <a:pPr algn="just">
-              <a:defRPr sz="1400">
-                <a:solidFill>
-                  <a:srgbClr val="F9FAFB"/>
-                </a:solidFill>
-                <a:latin typeface="Lato"/>
+              <a:defRPr sz="1300">
+                <a:solidFill>
+                  <a:srgbClr val="F5F3FF"/>
+                </a:solidFill>
               </a:defRPr>
             </a:pPr>
             <a:r>
-              <a:t>Satellite TV and international radio expanded global reach in the 1970s-80s. By the 1990s, cable networks and home video (VHS, Betamax) enabled cross-border content sharing. The internet’s rise in late 1990s disrupted traditional media, enabling global streaming and digital piracy. Hollywood, Bollywood, and J-pop gained international audiences, while local media industries adapted to transnational competition.</a:t>
-            </a:r>
-          </a:p>
-        </p:txBody>
-      </p:sp>
-    </p:spTree>
-  </p:cSld>
-  <p:clrMapOvr>
-    <a:masterClrMapping/>
-  </p:clrMapOvr>
-</p:sld>
-</file>
-
-<file path=ppt/slides/slide6.xml><?xml version="1.0" encoding="utf-8"?>
-<p:sld xmlns:a="http://schemas.openxmlformats.org/drawingml/2006/main" xmlns:p="http://schemas.openxmlformats.org/presentationml/2006/main" xmlns:r="http://schemas.openxmlformats.org/officeDocument/2006/relationships">
-  <p:cSld>
-    <p:bg>
-      <p:bgPr>
-        <a:solidFill>
-          <a:srgbClr val="111827"/>
-        </a:solidFill>
-        <a:effectLst/>
-      </p:bgPr>
-    </p:bg>
-    <p:spTree>
-      <p:nvGrpSpPr>
-        <p:cNvPr id="1" name=""/>
-        <p:cNvGrpSpPr/>
-        <p:nvPr/>
-      </p:nvGrpSpPr>
-      <p:grpSpPr/>
-      <p:sp>
-        <p:nvSpPr>
-          <p:cNvPr id="2" name="TextBox 1"/>
-          <p:cNvSpPr txBox="1"/>
-          <p:nvPr/>
-        </p:nvSpPr>
-        <p:spPr>
-          <a:xfrm>
-            <a:off x="457200" y="1371600"/>
-            <a:ext cx="3657600" cy="2743200"/>
-          </a:xfrm>
-          <a:prstGeom prst="rect">
-            <a:avLst/>
-          </a:prstGeom>
-          <a:noFill/>
-          <a:ln w="9525">
-            <a:noFill/>
-          </a:ln>
-        </p:spPr>
-        <p:txBody>
-          <a:bodyPr wrap="square">
-            <a:normAutofit/>
-          </a:bodyPr>
-          <a:lstStyle/>
+              <a:t>1990s COBE/WMAP: First detailed CMB temperature maps confirming inflation</a:t>
+            </a:r>
+          </a:p>
           <a:p>
             <a:pPr algn="just">
-              <a:defRPr sz="1800">
-                <a:solidFill>
-                  <a:srgbClr val="F9FAFB"/>
-                </a:solidFill>
-                <a:latin typeface="Lato"/>
+              <a:defRPr sz="1300">
+                <a:solidFill>
+                  <a:srgbClr val="F5F3FF"/>
+                </a:solidFill>
               </a:defRPr>
             </a:pPr>
             <a:r>
-              <a:t>Original sketches relied on hand-drawn frames and analog tools. Animators used pencil, ink, and paper to create frame-by-frame sequences. Limited by physical constraints, these methods required extensive time for fluid motion and depth.</a:t>
-            </a:r>
-          </a:p>
-        </p:txBody>
-      </p:sp>
-      <p:sp>
-        <p:nvSpPr>
-          <p:cNvPr id="3" name="TextBox 2"/>
-          <p:cNvSpPr txBox="1"/>
-          <p:nvPr/>
-        </p:nvSpPr>
-        <p:spPr>
-          <a:xfrm>
-            <a:off x="5029200" y="3200400"/>
-            <a:ext cx="3657600" cy="2743200"/>
-          </a:xfrm>
-          <a:prstGeom prst="rect">
-            <a:avLst/>
-          </a:prstGeom>
-          <a:noFill/>
-          <a:ln w="9525">
-            <a:noFill/>
-          </a:ln>
-        </p:spPr>
-        <p:txBody>
-          <a:bodyPr wrap="square">
-            <a:normAutofit/>
-          </a:bodyPr>
-          <a:lstStyle/>
+              <a:t>2000s: Sloan Digital Sky Survey reveals large-scale structure matching dark matter predictions</a:t>
+            </a:r>
+          </a:p>
           <a:p>
             <a:pPr algn="just">
-              <a:defRPr sz="1800">
-                <a:solidFill>
-                  <a:srgbClr val="F9FAFB"/>
-                </a:solidFill>
-                <a:latin typeface="Lato"/>
+              <a:defRPr sz="1300">
+                <a:solidFill>
+                  <a:srgbClr val="F5F3FF"/>
+                </a:solidFill>
               </a:defRPr>
             </a:pPr>
             <a:r>
-              <a:t>Modern renderings leverage 3D software and real-time engines. Tools like Blender and Unreal Engine enable dynamic lighting, physics, and motion capture integration. Automated rigging and GPU acceleration drastically reduce production time while increasing visual complexity.</a:t>
+              <a:t>2005-2010: Supernova surveys validate accelerating expansion via redshift-distance relationships</a:t>
             </a:r>
           </a:p>
         </p:txBody>
@@ -4074,7 +3939,7 @@
     <p:bg>
       <p:bgPr>
         <a:solidFill>
-          <a:srgbClr val="111827"/>
+          <a:srgbClr val="1E1B4B"/>
         </a:solidFill>
         <a:effectLst/>
       </p:bgPr>
@@ -4088,57 +3953,14 @@
       <p:grpSpPr/>
       <p:sp>
         <p:nvSpPr>
-          <p:cNvPr id="2" name="Rectangle 1"/>
-          <p:cNvSpPr/>
+          <p:cNvPr id="2" name="TextBox 1"/>
+          <p:cNvSpPr txBox="1"/>
           <p:nvPr/>
         </p:nvSpPr>
         <p:spPr>
           <a:xfrm>
-            <a:off x="0" y="457200"/>
-            <a:ext cx="9144000" cy="1097280"/>
-          </a:xfrm>
-          <a:prstGeom prst="rect">
-            <a:avLst/>
-          </a:prstGeom>
-          <a:solidFill>
-            <a:srgbClr val="1F2937"/>
-          </a:solidFill>
-          <a:ln>
-            <a:noFill/>
-          </a:ln>
-        </p:spPr>
-        <p:style>
-          <a:lnRef idx="1">
-            <a:schemeClr val="accent1"/>
-          </a:lnRef>
-          <a:fillRef idx="3">
-            <a:schemeClr val="accent1"/>
-          </a:fillRef>
-          <a:effectRef idx="2">
-            <a:schemeClr val="accent1"/>
-          </a:effectRef>
-          <a:fontRef idx="minor">
-            <a:schemeClr val="lt1"/>
-          </a:fontRef>
-        </p:style>
-        <p:txBody>
-          <a:bodyPr rtlCol="0" anchor="ctr"/>
-          <a:lstStyle/>
-          <a:p>
-            <a:pPr algn="ctr"/>
-          </a:p>
-        </p:txBody>
-      </p:sp>
-      <p:sp>
-        <p:nvSpPr>
-          <p:cNvPr id="3" name="TextBox 2"/>
-          <p:cNvSpPr txBox="1"/>
-          <p:nvPr/>
-        </p:nvSpPr>
-        <p:spPr>
-          <a:xfrm>
-            <a:off x="457200" y="548640"/>
-            <a:ext cx="8229600" cy="914400"/>
+            <a:off x="457200" y="2743200"/>
+            <a:ext cx="8229600" cy="1371600"/>
           </a:xfrm>
           <a:prstGeom prst="rect">
             <a:avLst/>
@@ -4155,90 +3977,15 @@
           <a:lstStyle/>
           <a:p>
             <a:pPr algn="just">
-              <a:defRPr sz="3000">
-                <a:solidFill>
-                  <a:srgbClr val="F9FAFB"/>
-                </a:solidFill>
-                <a:latin typeface="Playfair Display"/>
+              <a:defRPr sz="2600">
+                <a:solidFill>
+                  <a:srgbClr val="F5F3FF"/>
+                </a:solidFill>
+                <a:latin typeface="Archivo Black"/>
               </a:defRPr>
             </a:pPr>
             <a:r>
-              <a:t>Global Cultural Impact: Key Statistics</a:t>
-            </a:r>
-          </a:p>
-        </p:txBody>
-      </p:sp>
-      <p:sp>
-        <p:nvSpPr>
-          <p:cNvPr id="4" name="TextBox 3"/>
-          <p:cNvSpPr txBox="1"/>
-          <p:nvPr/>
-        </p:nvSpPr>
-        <p:spPr>
-          <a:xfrm>
-            <a:off x="914400" y="2011680"/>
-            <a:ext cx="7315200" cy="4114800"/>
-          </a:xfrm>
-          <a:prstGeom prst="rect">
-            <a:avLst/>
-          </a:prstGeom>
-          <a:noFill/>
-          <a:ln w="9525">
-            <a:noFill/>
-          </a:ln>
-        </p:spPr>
-        <p:txBody>
-          <a:bodyPr wrap="square">
-            <a:normAutofit/>
-          </a:bodyPr>
-          <a:lstStyle/>
-          <a:p>
-            <a:pPr algn="just">
-              <a:defRPr sz="1800">
-                <a:solidFill>
-                  <a:srgbClr val="F9FAFB"/>
-                </a:solidFill>
-                <a:latin typeface="Lato"/>
-              </a:defRPr>
-            </a:pPr>
-            <a:r>
-              <a:t>• Over 4.5 billion monthly active users across major social platforms drive real-time cultural conversations.</a:t>
-            </a:r>
-          </a:p>
-          <a:p>
-            <a:pPr algn="just">
-              <a:defRPr sz="1800">
-                <a:solidFill>
-                  <a:srgbClr val="F9FAFB"/>
-                </a:solidFill>
-              </a:defRPr>
-            </a:pPr>
-            <a:r>
-              <a:t>• Top 10 global box office hits collectively surpass $15 billion annually, reflecting cinematic influence.</a:t>
-            </a:r>
-          </a:p>
-          <a:p>
-            <a:pPr algn="just">
-              <a:defRPr sz="1800">
-                <a:solidFill>
-                  <a:srgbClr val="F9FAFB"/>
-                </a:solidFill>
-              </a:defRPr>
-            </a:pPr>
-            <a:r>
-              <a:t>• Streaming services report 1.2 trillion annual song streams, reshaping music consumption habits.</a:t>
-            </a:r>
-          </a:p>
-          <a:p>
-            <a:pPr algn="just">
-              <a:defRPr sz="1800">
-                <a:solidFill>
-                  <a:srgbClr val="F9FAFB"/>
-                </a:solidFill>
-              </a:defRPr>
-            </a:pPr>
-            <a:r>
-              <a:t>• International festivals attract 200+ million attendees yearly, fostering cross-cultural exchange.</a:t>
+              <a:t>2015 LIGO Gravitational Wave Detection Confirmed Einstein's Century-Old Prediction Marking a Transformative Moment in Astrophysics</a:t>
             </a:r>
           </a:p>
         </p:txBody>
@@ -4257,306 +4004,7 @@
     <p:bg>
       <p:bgPr>
         <a:solidFill>
-          <a:srgbClr val="111827"/>
-        </a:solidFill>
-        <a:effectLst/>
-      </p:bgPr>
-    </p:bg>
-    <p:spTree>
-      <p:nvGrpSpPr>
-        <p:cNvPr id="1" name=""/>
-        <p:cNvGrpSpPr/>
-        <p:nvPr/>
-      </p:nvGrpSpPr>
-      <p:grpSpPr/>
-      <p:sp>
-        <p:nvSpPr>
-          <p:cNvPr id="2" name="TextBox 1"/>
-          <p:cNvSpPr txBox="1"/>
-          <p:nvPr/>
-        </p:nvSpPr>
-        <p:spPr>
-          <a:xfrm>
-            <a:off x="457200" y="457200"/>
-            <a:ext cx="8229600" cy="731520"/>
-          </a:xfrm>
-          <a:prstGeom prst="rect">
-            <a:avLst/>
-          </a:prstGeom>
-          <a:noFill/>
-          <a:ln w="9525">
-            <a:noFill/>
-          </a:ln>
-        </p:spPr>
-        <p:txBody>
-          <a:bodyPr wrap="square">
-            <a:normAutofit/>
-          </a:bodyPr>
-          <a:lstStyle/>
-          <a:p>
-            <a:pPr algn="just">
-              <a:defRPr sz="3000">
-                <a:solidFill>
-                  <a:srgbClr val="F9FAFB"/>
-                </a:solidFill>
-                <a:latin typeface="Lato"/>
-              </a:defRPr>
-            </a:pPr>
-            <a:r>
-              <a:t>Mickey Mouse: The Timeless Disney Icon</a:t>
-            </a:r>
-          </a:p>
-        </p:txBody>
-      </p:sp>
-      <p:sp>
-        <p:nvSpPr>
-          <p:cNvPr id="3" name="TextBox 2"/>
-          <p:cNvSpPr txBox="1"/>
-          <p:nvPr/>
-        </p:nvSpPr>
-        <p:spPr>
-          <a:xfrm>
-            <a:off x="457200" y="1645920"/>
-            <a:ext cx="2560320" cy="548640"/>
-          </a:xfrm>
-          <a:prstGeom prst="rect">
-            <a:avLst/>
-          </a:prstGeom>
-          <a:noFill/>
-          <a:ln w="9525">
-            <a:noFill/>
-          </a:ln>
-        </p:spPr>
-        <p:txBody>
-          <a:bodyPr wrap="square">
-            <a:normAutofit/>
-          </a:bodyPr>
-          <a:lstStyle/>
-          <a:p>
-            <a:pPr algn="just">
-              <a:defRPr sz="2200">
-                <a:solidFill>
-                  <a:srgbClr val="F9FAFB"/>
-                </a:solidFill>
-                <a:latin typeface="Lato"/>
-              </a:defRPr>
-            </a:pPr>
-            <a:r>
-              <a:t>Origins &amp; Legacy</a:t>
-            </a:r>
-          </a:p>
-        </p:txBody>
-      </p:sp>
-      <p:sp>
-        <p:nvSpPr>
-          <p:cNvPr id="4" name="TextBox 3"/>
-          <p:cNvSpPr txBox="1"/>
-          <p:nvPr/>
-        </p:nvSpPr>
-        <p:spPr>
-          <a:xfrm>
-            <a:off x="457200" y="2377440"/>
-            <a:ext cx="2560320" cy="3657600"/>
-          </a:xfrm>
-          <a:prstGeom prst="rect">
-            <a:avLst/>
-          </a:prstGeom>
-          <a:noFill/>
-          <a:ln w="9525">
-            <a:noFill/>
-          </a:ln>
-        </p:spPr>
-        <p:txBody>
-          <a:bodyPr wrap="square">
-            <a:normAutofit/>
-          </a:bodyPr>
-          <a:lstStyle/>
-          <a:p>
-            <a:pPr algn="just">
-              <a:defRPr sz="1700">
-                <a:solidFill>
-                  <a:srgbClr val="F9FAFB"/>
-                </a:solidFill>
-                <a:latin typeface="Lato"/>
-              </a:defRPr>
-            </a:pPr>
-            <a:r>
-              <a:t>Debuted in 1928's 'Steamboat Willie,' Mickey established Disney as a creative force. His simple, expressive design—rounded ears, friendly eyes—transcends language barriers, making him universally recognizable. Over 95 years, he remains a symbol of childhood wonder.</a:t>
-            </a:r>
-          </a:p>
-        </p:txBody>
-      </p:sp>
-      <p:sp>
-        <p:nvSpPr>
-          <p:cNvPr id="5" name="TextBox 4"/>
-          <p:cNvSpPr txBox="1"/>
-          <p:nvPr/>
-        </p:nvSpPr>
-        <p:spPr>
-          <a:xfrm>
-            <a:off x="3291840" y="1645920"/>
-            <a:ext cx="2560320" cy="548640"/>
-          </a:xfrm>
-          <a:prstGeom prst="rect">
-            <a:avLst/>
-          </a:prstGeom>
-          <a:noFill/>
-          <a:ln w="9525">
-            <a:noFill/>
-          </a:ln>
-        </p:spPr>
-        <p:txBody>
-          <a:bodyPr wrap="square">
-            <a:normAutofit/>
-          </a:bodyPr>
-          <a:lstStyle/>
-          <a:p>
-            <a:pPr algn="just">
-              <a:defRPr sz="1800">
-                <a:solidFill>
-                  <a:srgbClr val="F9FAFB"/>
-                </a:solidFill>
-                <a:latin typeface="Lato"/>
-              </a:defRPr>
-            </a:pPr>
-            <a:r>
-              <a:t>Personality &amp; Temperament</a:t>
-            </a:r>
-          </a:p>
-        </p:txBody>
-      </p:sp>
-      <p:sp>
-        <p:nvSpPr>
-          <p:cNvPr id="6" name="TextBox 5"/>
-          <p:cNvSpPr txBox="1"/>
-          <p:nvPr/>
-        </p:nvSpPr>
-        <p:spPr>
-          <a:xfrm>
-            <a:off x="3291840" y="2377440"/>
-            <a:ext cx="2560320" cy="3657600"/>
-          </a:xfrm>
-          <a:prstGeom prst="rect">
-            <a:avLst/>
-          </a:prstGeom>
-          <a:noFill/>
-          <a:ln w="9525">
-            <a:noFill/>
-          </a:ln>
-        </p:spPr>
-        <p:txBody>
-          <a:bodyPr wrap="square">
-            <a:normAutofit/>
-          </a:bodyPr>
-          <a:lstStyle/>
-          <a:p>
-            <a:pPr algn="just">
-              <a:defRPr sz="1700">
-                <a:solidFill>
-                  <a:srgbClr val="F9FAFB"/>
-                </a:solidFill>
-                <a:latin typeface="Lato"/>
-              </a:defRPr>
-            </a:pPr>
-            <a:r>
-              <a:t>Mickey's cheerful optimism contrasts with Donald Duck's short temper and Elsa's regal reserve. His adaptability—hero, everyman, leader—allows storytelling flexibility. Unlike characters bound to specific arcs, Mickey thrives in diverse roles from slapstick to sci-fi.</a:t>
-            </a:r>
-          </a:p>
-        </p:txBody>
-      </p:sp>
-      <p:sp>
-        <p:nvSpPr>
-          <p:cNvPr id="7" name="TextBox 6"/>
-          <p:cNvSpPr txBox="1"/>
-          <p:nvPr/>
-        </p:nvSpPr>
-        <p:spPr>
-          <a:xfrm>
-            <a:off x="6126480" y="1645920"/>
-            <a:ext cx="2560320" cy="548640"/>
-          </a:xfrm>
-          <a:prstGeom prst="rect">
-            <a:avLst/>
-          </a:prstGeom>
-          <a:noFill/>
-          <a:ln w="9525">
-            <a:noFill/>
-          </a:ln>
-        </p:spPr>
-        <p:txBody>
-          <a:bodyPr wrap="square">
-            <a:normAutofit/>
-          </a:bodyPr>
-          <a:lstStyle/>
-          <a:p>
-            <a:pPr algn="just">
-              <a:defRPr sz="1800">
-                <a:solidFill>
-                  <a:srgbClr val="F9FAFB"/>
-                </a:solidFill>
-                <a:latin typeface="Lato"/>
-              </a:defRPr>
-            </a:pPr>
-            <a:r>
-              <a:t>Cultural Symbolism &amp; Evolution</a:t>
-            </a:r>
-          </a:p>
-        </p:txBody>
-      </p:sp>
-      <p:sp>
-        <p:nvSpPr>
-          <p:cNvPr id="8" name="TextBox 7"/>
-          <p:cNvSpPr txBox="1"/>
-          <p:nvPr/>
-        </p:nvSpPr>
-        <p:spPr>
-          <a:xfrm>
-            <a:off x="6126480" y="2377440"/>
-            <a:ext cx="2560320" cy="3657600"/>
-          </a:xfrm>
-          <a:prstGeom prst="rect">
-            <a:avLst/>
-          </a:prstGeom>
-          <a:noFill/>
-          <a:ln w="9525">
-            <a:noFill/>
-          </a:ln>
-        </p:spPr>
-        <p:txBody>
-          <a:bodyPr wrap="square">
-            <a:normAutofit/>
-          </a:bodyPr>
-          <a:lstStyle/>
-          <a:p>
-            <a:pPr algn="just">
-              <a:defRPr sz="1700">
-                <a:solidFill>
-                  <a:srgbClr val="F9FAFB"/>
-                </a:solidFill>
-                <a:latin typeface="Lato"/>
-              </a:defRPr>
-            </a:pPr>
-            <a:r>
-              <a:t>While Elsa represents modern empowerment and Donald embodies relatable frustration, Mickey symbolizes pure joy. His design updates (e.g., 2018 'Walt Disney: The Exhibition') maintain relevance without losing his 1928 essence, bridging generations of audiences worldwide.</a:t>
-            </a:r>
-          </a:p>
-        </p:txBody>
-      </p:sp>
-    </p:spTree>
-  </p:cSld>
-  <p:clrMapOvr>
-    <a:masterClrMapping/>
-  </p:clrMapOvr>
-</p:sld>
-</file>
-
-<file path=ppt/slides/slide9.xml><?xml version="1.0" encoding="utf-8"?>
-<p:sld xmlns:a="http://schemas.openxmlformats.org/drawingml/2006/main" xmlns:p="http://schemas.openxmlformats.org/presentationml/2006/main" xmlns:r="http://schemas.openxmlformats.org/officeDocument/2006/relationships">
-  <p:cSld>
-    <p:bg>
-      <p:bgPr>
-        <a:solidFill>
-          <a:srgbClr val="111827"/>
+          <a:srgbClr val="1E1B4B"/>
         </a:solidFill>
         <a:effectLst/>
       </p:bgPr>
@@ -4596,13 +4044,13 @@
             <a:pPr algn="just">
               <a:defRPr sz="2900">
                 <a:solidFill>
-                  <a:srgbClr val="F9FAFB"/>
-                </a:solidFill>
-                <a:latin typeface="Playfair Display"/>
+                  <a:srgbClr val="F5F3FF"/>
+                </a:solidFill>
+                <a:latin typeface="Archivo Black"/>
               </a:defRPr>
             </a:pPr>
             <a:r>
-              <a:t>Mickey Mouse: A Timeless Symbol of Innovation and Joy</a:t>
+              <a:t>Quantum Gravity: Open Questions and Future Directions</a:t>
             </a:r>
           </a:p>
         </p:txBody>
@@ -4633,15 +4081,15 @@
           <a:lstStyle/>
           <a:p>
             <a:pPr algn="just">
-              <a:defRPr sz="1800">
-                <a:solidFill>
-                  <a:srgbClr val="F9FAFB"/>
-                </a:solidFill>
-                <a:latin typeface="Lato"/>
+              <a:defRPr sz="1700">
+                <a:solidFill>
+                  <a:srgbClr val="F5F3FF"/>
+                </a:solidFill>
+                <a:latin typeface="Work Sans"/>
               </a:defRPr>
             </a:pPr>
             <a:r>
-              <a:t>Debuted in Steamboat Willie (1928), Mickey revolutionized animation through synchronized sound, expressive character design, and relatable storytelling. His global appeal transcended language barriers, becoming a universal icon for Disney's storytelling empire. From merchandise to theme parks, Mickey remains a cornerstone of cultural nostalgia while adapting to modern audiences. His legacy reflects evolving societal values, including inclusivity and environmental stewardship, ensuring relevance across generations.</a:t>
+              <a:t>Quantum gravity remains one of physics' most profound challenges, as reconciling general relativity with quantum mechanics eludes a unified framework. Key unresolved issues include the measurement problem in quantum spacetime, the nature of singularities, and the absence of experimental verification. Future research may focus on developing novel mathematical formalisms, leveraging high-energy cosmological observations, advancing particle accelerator technologies, and exploring quantum computing simulations. Collaborative efforts across theoretical physics, mathematics, and observational astronomy will be critical in addressing these open questions.</a:t>
             </a:r>
           </a:p>
         </p:txBody>
